--- a/documents/3.0.0/s98Mtg_july2026.pptx
+++ b/documents/3.0.0/s98Mtg_july2026.pptx
@@ -10,10 +10,10 @@
     <p:sldId id="260" r:id="rId4"/>
     <p:sldId id="259" r:id="rId5"/>
     <p:sldId id="269" r:id="rId6"/>
-    <p:sldId id="262" r:id="rId7"/>
-    <p:sldId id="272" r:id="rId8"/>
-    <p:sldId id="261" r:id="rId9"/>
-    <p:sldId id="271" r:id="rId10"/>
+    <p:sldId id="271" r:id="rId7"/>
+    <p:sldId id="262" r:id="rId8"/>
+    <p:sldId id="272" r:id="rId9"/>
+    <p:sldId id="261" r:id="rId10"/>
     <p:sldId id="264" r:id="rId11"/>
     <p:sldId id="265" r:id="rId12"/>
     <p:sldId id="258" r:id="rId13"/>
@@ -3353,11 +3353,17 @@
             <p:ph type="ctrTitle"/>
           </p:nvPr>
         </p:nvSpPr>
-        <p:spPr/>
+        <p:spPr>
+          <a:xfrm>
+            <a:off x="2577548" y="1152180"/>
+            <a:ext cx="9144000" cy="2387600"/>
+          </a:xfrm>
+        </p:spPr>
         <p:txBody>
           <a:bodyPr/>
           <a:lstStyle/>
           <a:p>
+            <a:pPr algn="r"/>
             <a:r>
               <a:rPr lang="en-GB" dirty="0"/>
               <a:t>S-98 / S-164 Meeting</a:t>
@@ -3381,11 +3387,17 @@
             <p:ph type="subTitle" idx="1"/>
           </p:nvPr>
         </p:nvSpPr>
-        <p:spPr/>
+        <p:spPr>
+          <a:xfrm>
+            <a:off x="2577548" y="3631855"/>
+            <a:ext cx="9144000" cy="1655762"/>
+          </a:xfrm>
+        </p:spPr>
         <p:txBody>
           <a:bodyPr/>
           <a:lstStyle/>
           <a:p>
+            <a:pPr algn="r"/>
             <a:r>
               <a:rPr lang="en-GB" dirty="0"/>
               <a:t>9</a:t>
@@ -4554,6 +4566,15 @@
           <a:p>
             <a:r>
               <a:rPr lang="en-GB" dirty="0"/>
+              <a:t>Vertical Clearance</a:t>
+            </a:r>
+          </a:p>
+          <a:p>
+            <a:endParaRPr lang="en-GB" dirty="0"/>
+          </a:p>
+          <a:p>
+            <a:r>
+              <a:rPr lang="en-GB" dirty="0"/>
               <a:t>Others?</a:t>
             </a:r>
           </a:p>
@@ -5847,6 +5868,124 @@
           <p:cNvPr id="2" name="Title 1">
             <a:extLst>
               <a:ext uri="{FF2B5EF4-FFF2-40B4-BE49-F238E27FC236}">
+                <a16:creationId xmlns:a16="http://schemas.microsoft.com/office/drawing/2014/main" id="{99138613-6EB5-A4DB-5702-FDFA3FC14B30}"/>
+              </a:ext>
+            </a:extLst>
+          </p:cNvPr>
+          <p:cNvSpPr>
+            <a:spLocks noGrp="1"/>
+          </p:cNvSpPr>
+          <p:nvPr>
+            <p:ph type="title"/>
+          </p:nvPr>
+        </p:nvSpPr>
+        <p:spPr/>
+        <p:txBody>
+          <a:bodyPr/>
+          <a:lstStyle/>
+          <a:p>
+            <a:r>
+              <a:rPr lang="en-GB" dirty="0"/>
+              <a:t>Data constraints Annex</a:t>
+            </a:r>
+          </a:p>
+        </p:txBody>
+      </p:sp>
+      <p:sp>
+        <p:nvSpPr>
+          <p:cNvPr id="3" name="Content Placeholder 2">
+            <a:extLst>
+              <a:ext uri="{FF2B5EF4-FFF2-40B4-BE49-F238E27FC236}">
+                <a16:creationId xmlns:a16="http://schemas.microsoft.com/office/drawing/2014/main" id="{BD7DCD44-A67F-C3FE-D061-2BB2BEB6442F}"/>
+              </a:ext>
+            </a:extLst>
+          </p:cNvPr>
+          <p:cNvSpPr>
+            <a:spLocks noGrp="1"/>
+          </p:cNvSpPr>
+          <p:nvPr>
+            <p:ph idx="1"/>
+          </p:nvPr>
+        </p:nvSpPr>
+        <p:spPr/>
+        <p:txBody>
+          <a:bodyPr/>
+          <a:lstStyle/>
+          <a:p>
+            <a:r>
+              <a:rPr lang="en-GB" dirty="0"/>
+              <a:t>Need to do a fuller review and decide what needs to be added into data constraints post-HSSC review.</a:t>
+            </a:r>
+          </a:p>
+          <a:p>
+            <a:r>
+              <a:rPr lang="en-GB" dirty="0"/>
+              <a:t>I will prepare an initial version but would LOVE some inputs?</a:t>
+            </a:r>
+          </a:p>
+          <a:p>
+            <a:r>
+              <a:rPr lang="en-GB" dirty="0"/>
+              <a:t>Some input already re: signatures and </a:t>
+            </a:r>
+            <a:r>
+              <a:rPr lang="en-GB" dirty="0" err="1"/>
+              <a:t>catalog.xml</a:t>
+            </a:r>
+            <a:r>
+              <a:rPr lang="en-GB" dirty="0"/>
+              <a:t> elements.</a:t>
+            </a:r>
+          </a:p>
+          <a:p>
+            <a:r>
+              <a:rPr lang="en-GB" dirty="0"/>
+              <a:t>Next meeting bigger discussion on this topic</a:t>
+            </a:r>
+          </a:p>
+          <a:p>
+            <a:r>
+              <a:rPr lang="en-GB" dirty="0"/>
+              <a:t>Please submit proposals for updates to DCA. We can change it!</a:t>
+            </a:r>
+          </a:p>
+        </p:txBody>
+      </p:sp>
+    </p:spTree>
+    <p:extLst>
+      <p:ext uri="{BB962C8B-B14F-4D97-AF65-F5344CB8AC3E}">
+        <p14:creationId xmlns:p14="http://schemas.microsoft.com/office/powerpoint/2010/main" val="2721670128"/>
+      </p:ext>
+    </p:extLst>
+  </p:cSld>
+  <p:clrMapOvr>
+    <a:masterClrMapping/>
+  </p:clrMapOvr>
+</p:sld>
+</file>
+
+<file path=ppt/slides/slide7.xml><?xml version="1.0" encoding="utf-8"?>
+<p:sld xmlns:a="http://schemas.openxmlformats.org/drawingml/2006/main" xmlns:r="http://schemas.openxmlformats.org/officeDocument/2006/relationships" xmlns:p="http://schemas.openxmlformats.org/presentationml/2006/main">
+  <p:cSld>
+    <p:spTree>
+      <p:nvGrpSpPr>
+        <p:cNvPr id="1" name=""/>
+        <p:cNvGrpSpPr/>
+        <p:nvPr/>
+      </p:nvGrpSpPr>
+      <p:grpSpPr>
+        <a:xfrm>
+          <a:off x="0" y="0"/>
+          <a:ext cx="0" cy="0"/>
+          <a:chOff x="0" y="0"/>
+          <a:chExt cx="0" cy="0"/>
+        </a:xfrm>
+      </p:grpSpPr>
+      <p:sp>
+        <p:nvSpPr>
+          <p:cNvPr id="2" name="Title 1">
+            <a:extLst>
+              <a:ext uri="{FF2B5EF4-FFF2-40B4-BE49-F238E27FC236}">
                 <a16:creationId xmlns:a16="http://schemas.microsoft.com/office/drawing/2014/main" id="{A76EA53B-03F1-DADC-4B3D-999731E9CB78}"/>
               </a:ext>
             </a:extLst>
@@ -6382,7 +6521,7 @@
 </p:sld>
 </file>
 
-<file path=ppt/slides/slide7.xml><?xml version="1.0" encoding="utf-8"?>
+<file path=ppt/slides/slide8.xml><?xml version="1.0" encoding="utf-8"?>
 <p:sld xmlns:a="http://schemas.openxmlformats.org/drawingml/2006/main" xmlns:r="http://schemas.openxmlformats.org/officeDocument/2006/relationships" xmlns:p="http://schemas.openxmlformats.org/presentationml/2006/main">
   <p:cSld>
     <p:spTree>
@@ -7174,7 +7313,7 @@
 </p:sld>
 </file>
 
-<file path=ppt/slides/slide8.xml><?xml version="1.0" encoding="utf-8"?>
+<file path=ppt/slides/slide9.xml><?xml version="1.0" encoding="utf-8"?>
 <p:sld xmlns:a="http://schemas.openxmlformats.org/drawingml/2006/main" xmlns:r="http://schemas.openxmlformats.org/officeDocument/2006/relationships" xmlns:p="http://schemas.openxmlformats.org/presentationml/2006/main">
   <p:cSld>
     <p:spTree>
@@ -7796,86 +7935,6 @@
     <p:extLst>
       <p:ext uri="{BB962C8B-B14F-4D97-AF65-F5344CB8AC3E}">
         <p14:creationId xmlns:p14="http://schemas.microsoft.com/office/powerpoint/2010/main" val="2569886001"/>
-      </p:ext>
-    </p:extLst>
-  </p:cSld>
-  <p:clrMapOvr>
-    <a:masterClrMapping/>
-  </p:clrMapOvr>
-</p:sld>
-</file>
-
-<file path=ppt/slides/slide9.xml><?xml version="1.0" encoding="utf-8"?>
-<p:sld xmlns:a="http://schemas.openxmlformats.org/drawingml/2006/main" xmlns:r="http://schemas.openxmlformats.org/officeDocument/2006/relationships" xmlns:p="http://schemas.openxmlformats.org/presentationml/2006/main">
-  <p:cSld>
-    <p:spTree>
-      <p:nvGrpSpPr>
-        <p:cNvPr id="1" name=""/>
-        <p:cNvGrpSpPr/>
-        <p:nvPr/>
-      </p:nvGrpSpPr>
-      <p:grpSpPr>
-        <a:xfrm>
-          <a:off x="0" y="0"/>
-          <a:ext cx="0" cy="0"/>
-          <a:chOff x="0" y="0"/>
-          <a:chExt cx="0" cy="0"/>
-        </a:xfrm>
-      </p:grpSpPr>
-      <p:sp>
-        <p:nvSpPr>
-          <p:cNvPr id="2" name="Title 1">
-            <a:extLst>
-              <a:ext uri="{FF2B5EF4-FFF2-40B4-BE49-F238E27FC236}">
-                <a16:creationId xmlns:a16="http://schemas.microsoft.com/office/drawing/2014/main" id="{99138613-6EB5-A4DB-5702-FDFA3FC14B30}"/>
-              </a:ext>
-            </a:extLst>
-          </p:cNvPr>
-          <p:cNvSpPr>
-            <a:spLocks noGrp="1"/>
-          </p:cNvSpPr>
-          <p:nvPr>
-            <p:ph type="title"/>
-          </p:nvPr>
-        </p:nvSpPr>
-        <p:spPr/>
-        <p:txBody>
-          <a:bodyPr/>
-          <a:lstStyle/>
-          <a:p>
-            <a:endParaRPr lang="en-GB"/>
-          </a:p>
-        </p:txBody>
-      </p:sp>
-      <p:sp>
-        <p:nvSpPr>
-          <p:cNvPr id="3" name="Content Placeholder 2">
-            <a:extLst>
-              <a:ext uri="{FF2B5EF4-FFF2-40B4-BE49-F238E27FC236}">
-                <a16:creationId xmlns:a16="http://schemas.microsoft.com/office/drawing/2014/main" id="{BD7DCD44-A67F-C3FE-D061-2BB2BEB6442F}"/>
-              </a:ext>
-            </a:extLst>
-          </p:cNvPr>
-          <p:cNvSpPr>
-            <a:spLocks noGrp="1"/>
-          </p:cNvSpPr>
-          <p:nvPr>
-            <p:ph idx="1"/>
-          </p:nvPr>
-        </p:nvSpPr>
-        <p:spPr/>
-        <p:txBody>
-          <a:bodyPr/>
-          <a:lstStyle/>
-          <a:p>
-            <a:endParaRPr lang="en-GB"/>
-          </a:p>
-        </p:txBody>
-      </p:sp>
-    </p:spTree>
-    <p:extLst>
-      <p:ext uri="{BB962C8B-B14F-4D97-AF65-F5344CB8AC3E}">
-        <p14:creationId xmlns:p14="http://schemas.microsoft.com/office/powerpoint/2010/main" val="2721670128"/>
       </p:ext>
     </p:extLst>
   </p:cSld>
